--- a/UI_Screenshots.pptx
+++ b/UI_Screenshots.pptx
@@ -111,6 +111,11 @@
       </a:defRPr>
     </a:lvl9pPr>
   </p:defaultTextStyle>
+  <p:extLst>
+    <p:ext uri="{EFAFB233-063F-42B5-8137-9DF3F51BA10A}">
+      <p15:sldGuideLst xmlns:p15="http://schemas.microsoft.com/office/powerpoint/2012/main"/>
+    </p:ext>
+  </p:extLst>
 </p:presentation>
 </file>
 
@@ -263,7 +268,7 @@
           <a:p>
             <a:fld id="{EC23457E-23D0-454C-89D5-7C22AFA0DC8A}" type="datetimeFigureOut">
               <a:rPr lang="en-AE" smtClean="0"/>
-              <a:t>27/02/2026</a:t>
+              <a:t>13/03/2026</a:t>
             </a:fld>
             <a:endParaRPr lang="en-AE"/>
           </a:p>
@@ -463,7 +468,7 @@
           <a:p>
             <a:fld id="{EC23457E-23D0-454C-89D5-7C22AFA0DC8A}" type="datetimeFigureOut">
               <a:rPr lang="en-AE" smtClean="0"/>
-              <a:t>27/02/2026</a:t>
+              <a:t>13/03/2026</a:t>
             </a:fld>
             <a:endParaRPr lang="en-AE"/>
           </a:p>
@@ -673,7 +678,7 @@
           <a:p>
             <a:fld id="{EC23457E-23D0-454C-89D5-7C22AFA0DC8A}" type="datetimeFigureOut">
               <a:rPr lang="en-AE" smtClean="0"/>
-              <a:t>27/02/2026</a:t>
+              <a:t>13/03/2026</a:t>
             </a:fld>
             <a:endParaRPr lang="en-AE"/>
           </a:p>
@@ -873,7 +878,7 @@
           <a:p>
             <a:fld id="{EC23457E-23D0-454C-89D5-7C22AFA0DC8A}" type="datetimeFigureOut">
               <a:rPr lang="en-AE" smtClean="0"/>
-              <a:t>27/02/2026</a:t>
+              <a:t>13/03/2026</a:t>
             </a:fld>
             <a:endParaRPr lang="en-AE"/>
           </a:p>
@@ -1149,7 +1154,7 @@
           <a:p>
             <a:fld id="{EC23457E-23D0-454C-89D5-7C22AFA0DC8A}" type="datetimeFigureOut">
               <a:rPr lang="en-AE" smtClean="0"/>
-              <a:t>27/02/2026</a:t>
+              <a:t>13/03/2026</a:t>
             </a:fld>
             <a:endParaRPr lang="en-AE"/>
           </a:p>
@@ -1417,7 +1422,7 @@
           <a:p>
             <a:fld id="{EC23457E-23D0-454C-89D5-7C22AFA0DC8A}" type="datetimeFigureOut">
               <a:rPr lang="en-AE" smtClean="0"/>
-              <a:t>27/02/2026</a:t>
+              <a:t>13/03/2026</a:t>
             </a:fld>
             <a:endParaRPr lang="en-AE"/>
           </a:p>
@@ -1832,7 +1837,7 @@
           <a:p>
             <a:fld id="{EC23457E-23D0-454C-89D5-7C22AFA0DC8A}" type="datetimeFigureOut">
               <a:rPr lang="en-AE" smtClean="0"/>
-              <a:t>27/02/2026</a:t>
+              <a:t>13/03/2026</a:t>
             </a:fld>
             <a:endParaRPr lang="en-AE"/>
           </a:p>
@@ -1974,7 +1979,7 @@
           <a:p>
             <a:fld id="{EC23457E-23D0-454C-89D5-7C22AFA0DC8A}" type="datetimeFigureOut">
               <a:rPr lang="en-AE" smtClean="0"/>
-              <a:t>27/02/2026</a:t>
+              <a:t>13/03/2026</a:t>
             </a:fld>
             <a:endParaRPr lang="en-AE"/>
           </a:p>
@@ -2087,7 +2092,7 @@
           <a:p>
             <a:fld id="{EC23457E-23D0-454C-89D5-7C22AFA0DC8A}" type="datetimeFigureOut">
               <a:rPr lang="en-AE" smtClean="0"/>
-              <a:t>27/02/2026</a:t>
+              <a:t>13/03/2026</a:t>
             </a:fld>
             <a:endParaRPr lang="en-AE"/>
           </a:p>
@@ -2400,7 +2405,7 @@
           <a:p>
             <a:fld id="{EC23457E-23D0-454C-89D5-7C22AFA0DC8A}" type="datetimeFigureOut">
               <a:rPr lang="en-AE" smtClean="0"/>
-              <a:t>27/02/2026</a:t>
+              <a:t>13/03/2026</a:t>
             </a:fld>
             <a:endParaRPr lang="en-AE"/>
           </a:p>
@@ -2689,7 +2694,7 @@
           <a:p>
             <a:fld id="{EC23457E-23D0-454C-89D5-7C22AFA0DC8A}" type="datetimeFigureOut">
               <a:rPr lang="en-AE" smtClean="0"/>
-              <a:t>27/02/2026</a:t>
+              <a:t>13/03/2026</a:t>
             </a:fld>
             <a:endParaRPr lang="en-AE"/>
           </a:p>
@@ -2932,7 +2937,7 @@
           <a:p>
             <a:fld id="{EC23457E-23D0-454C-89D5-7C22AFA0DC8A}" type="datetimeFigureOut">
               <a:rPr lang="en-AE" smtClean="0"/>
-              <a:t>27/02/2026</a:t>
+              <a:t>13/03/2026</a:t>
             </a:fld>
             <a:endParaRPr lang="en-AE"/>
           </a:p>
@@ -3451,7 +3456,7 @@
         </p:blipFill>
         <p:spPr>
           <a:xfrm>
-            <a:off x="218773" y="263362"/>
+            <a:off x="141771" y="263362"/>
             <a:ext cx="11754454" cy="6331275"/>
           </a:xfrm>
           <a:prstGeom prst="rect">
@@ -3891,7 +3896,7 @@
         </p:blipFill>
         <p:spPr>
           <a:xfrm>
-            <a:off x="5253" y="87087"/>
+            <a:off x="0" y="0"/>
             <a:ext cx="12121974" cy="6651170"/>
           </a:xfrm>
           <a:prstGeom prst="rect">
